--- a/my_template.pptx
+++ b/my_template.pptx
@@ -209,7 +209,7 @@
           <a:p>
             <a:fld id="{D064416C-77FE-564C-A2DA-473082896773}" type="datetimeFigureOut">
               <a:rPr lang="en-US" smtClean="0"/>
-              <a:t>4/12/26</a:t>
+              <a:t>6/17/26</a:t>
             </a:fld>
             <a:endParaRPr lang="en-US"/>
           </a:p>
@@ -1041,7 +1041,7 @@
         <p:nvSpPr>
           <p:cNvPr id="3" name="Content Placeholder 2"/>
           <p:cNvSpPr>
-            <a:spLocks/>
+            <a:spLocks noGrp="1"/>
           </p:cNvSpPr>
           <p:nvPr>
             <p:ph type="body" idx="1"/>
@@ -1521,13 +1521,13 @@
         </p:nvCxnSpPr>
         <p:spPr>
           <a:xfrm>
-            <a:off x="4508500" y="1399769"/>
+            <a:off x="4508500" y="1415671"/>
             <a:ext cx="0" cy="4955400"/>
           </a:xfrm>
           <a:prstGeom prst="line">
             <a:avLst/>
           </a:prstGeom>
-          <a:ln w="25400">
+          <a:ln w="12700">
             <a:solidFill>
               <a:srgbClr val="000000"/>
             </a:solidFill>
